--- a/feature-slice/09a-document-code-gap/document-code-gap.pptx
+++ b/feature-slice/09a-document-code-gap/document-code-gap.pptx
@@ -5,14 +5,13 @@
     <p:sldMasterId id="2147483648" r:id="rId1"/>
   </p:sldMasterIdLst>
   <p:notesMasterIdLst>
-    <p:notesMasterId r:id="rId4"/>
+    <p:notesMasterId r:id="rId3"/>
   </p:notesMasterIdLst>
   <p:handoutMasterIdLst>
-    <p:handoutMasterId r:id="rId5"/>
+    <p:handoutMasterId r:id="rId4"/>
   </p:handoutMasterIdLst>
   <p:sldIdLst>
-    <p:sldId id="313" r:id="rId2"/>
-    <p:sldId id="316" r:id="rId3"/>
+    <p:sldId id="316" r:id="rId2"/>
   </p:sldIdLst>
   <p:sldSz cx="12192000" cy="6858000"/>
   <p:notesSz cx="6858000" cy="9144000"/>
@@ -1764,1033 +1763,6 @@
 </file>
 
 <file path=ppt/slides/slide1.xml><?xml version="1.0" encoding="utf-8"?>
-<p:sld xmlns:a="http://schemas.openxmlformats.org/drawingml/2006/main" xmlns:r="http://schemas.openxmlformats.org/officeDocument/2006/relationships" xmlns:p="http://schemas.openxmlformats.org/presentationml/2006/main">
-  <p:cSld>
-    <p:spTree>
-      <p:nvGrpSpPr>
-        <p:cNvPr id="1" name=""/>
-        <p:cNvGrpSpPr/>
-        <p:nvPr/>
-      </p:nvGrpSpPr>
-      <p:grpSpPr>
-        <a:xfrm>
-          <a:off x="0" y="0"/>
-          <a:ext cx="0" cy="0"/>
-          <a:chOff x="0" y="0"/>
-          <a:chExt cx="0" cy="0"/>
-        </a:xfrm>
-      </p:grpSpPr>
-      <p:sp>
-        <p:nvSpPr>
-          <p:cNvPr id="4" name="CICD"/>
-          <p:cNvSpPr/>
-          <p:nvPr/>
-        </p:nvSpPr>
-        <p:spPr>
-          <a:xfrm>
-            <a:off x="2406650" y="5462356"/>
-            <a:ext cx="7378700" cy="666750"/>
-          </a:xfrm>
-          <a:prstGeom prst="rect">
-            <a:avLst/>
-          </a:prstGeom>
-          <a:noFill/>
-          <a:ln/>
-        </p:spPr>
-        <p:txBody>
-          <a:bodyPr wrap="square" lIns="0" tIns="0" rIns="0" bIns="0" rtlCol="0" anchor="t"/>
-          <a:lstStyle/>
-          <a:p>
-            <a:pPr algn="ctr">
-              <a:lnSpc>
-                <a:spcPct val="133333"/>
-              </a:lnSpc>
-            </a:pPr>
-            <a:endParaRPr lang="en-US" sz="1100" dirty="0">
-              <a:latin typeface="Pretendard SemiBold" panose="02000703000000020004" pitchFamily="50" charset="-127"/>
-              <a:ea typeface="Pretendard SemiBold" panose="02000703000000020004" pitchFamily="50" charset="-127"/>
-              <a:cs typeface="Pretendard SemiBold" panose="02000703000000020004" pitchFamily="50" charset="-127"/>
-            </a:endParaRPr>
-          </a:p>
-        </p:txBody>
-      </p:sp>
-      <p:sp>
-        <p:nvSpPr>
-          <p:cNvPr id="5" name="CICD"/>
-          <p:cNvSpPr/>
-          <p:nvPr/>
-        </p:nvSpPr>
-        <p:spPr>
-          <a:xfrm>
-            <a:off x="2406650" y="5427865"/>
-            <a:ext cx="7378700" cy="885129"/>
-          </a:xfrm>
-          <a:prstGeom prst="rect">
-            <a:avLst/>
-          </a:prstGeom>
-          <a:noFill/>
-          <a:ln/>
-        </p:spPr>
-        <p:txBody>
-          <a:bodyPr wrap="square" lIns="0" tIns="0" rIns="0" bIns="0" rtlCol="0" anchor="ctr"/>
-          <a:lstStyle/>
-          <a:p>
-            <a:pPr algn="ctr">
-              <a:lnSpc>
-                <a:spcPct val="150000"/>
-              </a:lnSpc>
-            </a:pPr>
-            <a:endParaRPr lang="en-US" altLang="ko-KR" sz="1100" dirty="0">
-              <a:latin typeface="Pretendard SemiBold" panose="02000703000000020004" pitchFamily="50" charset="-127"/>
-              <a:ea typeface="Pretendard SemiBold" panose="02000703000000020004" pitchFamily="50" charset="-127"/>
-              <a:cs typeface="Pretendard SemiBold" panose="02000703000000020004" pitchFamily="50" charset="-127"/>
-            </a:endParaRPr>
-          </a:p>
-        </p:txBody>
-      </p:sp>
-      <p:grpSp>
-        <p:nvGrpSpPr>
-          <p:cNvPr id="6" name="그룹 5">
-            <a:extLst>
-              <a:ext uri="{FF2B5EF4-FFF2-40B4-BE49-F238E27FC236}">
-                <a16:creationId xmlns:a16="http://schemas.microsoft.com/office/drawing/2014/main" id="{1773C09A-468D-E7AE-9696-83405B30E197}"/>
-              </a:ext>
-            </a:extLst>
-          </p:cNvPr>
-          <p:cNvGrpSpPr/>
-          <p:nvPr/>
-        </p:nvGrpSpPr>
-        <p:grpSpPr>
-          <a:xfrm>
-            <a:off x="2680643" y="913922"/>
-            <a:ext cx="6830715" cy="4230599"/>
-            <a:chOff x="2686508" y="976066"/>
-            <a:chExt cx="6830715" cy="4230599"/>
-          </a:xfrm>
-        </p:grpSpPr>
-        <p:sp>
-          <p:nvSpPr>
-            <p:cNvPr id="7" name="직사각형 6">
-              <a:extLst>
-                <a:ext uri="{FF2B5EF4-FFF2-40B4-BE49-F238E27FC236}">
-                  <a16:creationId xmlns:a16="http://schemas.microsoft.com/office/drawing/2014/main" id="{AD99BA65-5DAF-7FC6-3F27-EB805F92AC1E}"/>
-                </a:ext>
-              </a:extLst>
-            </p:cNvPr>
-            <p:cNvSpPr/>
-            <p:nvPr/>
-          </p:nvSpPr>
-          <p:spPr>
-            <a:xfrm>
-              <a:off x="2686508" y="976066"/>
-              <a:ext cx="6830715" cy="4230599"/>
-            </a:xfrm>
-            <a:prstGeom prst="rect">
-              <a:avLst/>
-            </a:prstGeom>
-            <a:solidFill>
-              <a:schemeClr val="accent1">
-                <a:lumMod val="20000"/>
-                <a:lumOff val="80000"/>
-                <a:alpha val="35000"/>
-              </a:schemeClr>
-            </a:solidFill>
-            <a:ln>
-              <a:noFill/>
-            </a:ln>
-            <a:effectLst>
-              <a:softEdge rad="12700"/>
-            </a:effectLst>
-          </p:spPr>
-          <p:style>
-            <a:lnRef idx="2">
-              <a:schemeClr val="accent1">
-                <a:shade val="50000"/>
-              </a:schemeClr>
-            </a:lnRef>
-            <a:fillRef idx="1">
-              <a:schemeClr val="accent1"/>
-            </a:fillRef>
-            <a:effectRef idx="0">
-              <a:schemeClr val="accent1"/>
-            </a:effectRef>
-            <a:fontRef idx="minor">
-              <a:schemeClr val="lt1"/>
-            </a:fontRef>
-          </p:style>
-          <p:txBody>
-            <a:bodyPr rtlCol="0" anchor="t"/>
-            <a:lstStyle/>
-            <a:p>
-              <a:pPr algn="ctr"/>
-              <a:r>
-                <a:rPr lang="en-US" altLang="ko-KR" sz="1200" dirty="0">
-                  <a:solidFill>
-                    <a:schemeClr val="tx1">
-                      <a:lumMod val="85000"/>
-                      <a:lumOff val="15000"/>
-                    </a:schemeClr>
-                  </a:solidFill>
-                  <a:latin typeface="Pretendard SemiBold" panose="02000703000000020004" pitchFamily="50" charset="-127"/>
-                  <a:ea typeface="Pretendard SemiBold" panose="02000703000000020004" pitchFamily="50" charset="-127"/>
-                  <a:cs typeface="Pretendard SemiBold" panose="02000703000000020004" pitchFamily="50" charset="-127"/>
-                </a:rPr>
-                <a:t>CORE</a:t>
-              </a:r>
-              <a:endParaRPr lang="ko-KR" altLang="en-US" sz="1200" dirty="0">
-                <a:solidFill>
-                  <a:schemeClr val="tx1">
-                    <a:lumMod val="85000"/>
-                    <a:lumOff val="15000"/>
-                  </a:schemeClr>
-                </a:solidFill>
-                <a:latin typeface="Pretendard SemiBold" panose="02000703000000020004" pitchFamily="50" charset="-127"/>
-                <a:ea typeface="Pretendard SemiBold" panose="02000703000000020004" pitchFamily="50" charset="-127"/>
-                <a:cs typeface="Pretendard SemiBold" panose="02000703000000020004" pitchFamily="50" charset="-127"/>
-              </a:endParaRPr>
-            </a:p>
-          </p:txBody>
-        </p:sp>
-        <p:sp>
-          <p:nvSpPr>
-            <p:cNvPr id="8" name="직사각형 7">
-              <a:extLst>
-                <a:ext uri="{FF2B5EF4-FFF2-40B4-BE49-F238E27FC236}">
-                  <a16:creationId xmlns:a16="http://schemas.microsoft.com/office/drawing/2014/main" id="{15F07289-013A-FA33-EBF9-2BC0DFED4F65}"/>
-                </a:ext>
-              </a:extLst>
-            </p:cNvPr>
-            <p:cNvSpPr/>
-            <p:nvPr/>
-          </p:nvSpPr>
-          <p:spPr>
-            <a:xfrm>
-              <a:off x="5308307" y="3587630"/>
-              <a:ext cx="3139749" cy="1470580"/>
-            </a:xfrm>
-            <a:prstGeom prst="rect">
-              <a:avLst/>
-            </a:prstGeom>
-            <a:solidFill>
-              <a:schemeClr val="bg2">
-                <a:lumMod val="90000"/>
-                <a:alpha val="40000"/>
-              </a:schemeClr>
-            </a:solidFill>
-            <a:ln w="12700">
-              <a:noFill/>
-            </a:ln>
-            <a:effectLst>
-              <a:softEdge rad="12700"/>
-            </a:effectLst>
-          </p:spPr>
-          <p:style>
-            <a:lnRef idx="2">
-              <a:schemeClr val="accent1">
-                <a:shade val="50000"/>
-              </a:schemeClr>
-            </a:lnRef>
-            <a:fillRef idx="1">
-              <a:schemeClr val="accent1"/>
-            </a:fillRef>
-            <a:effectRef idx="0">
-              <a:schemeClr val="accent1"/>
-            </a:effectRef>
-            <a:fontRef idx="minor">
-              <a:schemeClr val="lt1"/>
-            </a:fontRef>
-          </p:style>
-          <p:txBody>
-            <a:bodyPr rtlCol="0" anchor="t"/>
-            <a:lstStyle/>
-            <a:p>
-              <a:pPr algn="ctr"/>
-              <a:r>
-                <a:rPr lang="en-US" altLang="ko-KR" sz="1100" b="1" dirty="0">
-                  <a:solidFill>
-                    <a:schemeClr val="tx1">
-                      <a:lumMod val="85000"/>
-                      <a:lumOff val="15000"/>
-                    </a:schemeClr>
-                  </a:solidFill>
-                  <a:latin typeface="Pretendard SemiBold" panose="02000703000000020004" pitchFamily="50" charset="-127"/>
-                  <a:ea typeface="Pretendard SemiBold" panose="02000703000000020004" pitchFamily="50" charset="-127"/>
-                  <a:cs typeface="Pretendard SemiBold" panose="02000703000000020004" pitchFamily="50" charset="-127"/>
-                </a:rPr>
-                <a:t>System Meta</a:t>
-              </a:r>
-            </a:p>
-          </p:txBody>
-        </p:sp>
-        <p:sp>
-          <p:nvSpPr>
-            <p:cNvPr id="9" name="직사각형 8">
-              <a:extLst>
-                <a:ext uri="{FF2B5EF4-FFF2-40B4-BE49-F238E27FC236}">
-                  <a16:creationId xmlns:a16="http://schemas.microsoft.com/office/drawing/2014/main" id="{15F07289-013A-FA33-EBF9-2BC0DFED4F65}"/>
-                </a:ext>
-              </a:extLst>
-            </p:cNvPr>
-            <p:cNvSpPr/>
-            <p:nvPr/>
-          </p:nvSpPr>
-          <p:spPr>
-            <a:xfrm>
-              <a:off x="5308307" y="1358914"/>
-              <a:ext cx="3139749" cy="2086255"/>
-            </a:xfrm>
-            <a:prstGeom prst="rect">
-              <a:avLst/>
-            </a:prstGeom>
-            <a:solidFill>
-              <a:schemeClr val="accent1">
-                <a:lumMod val="40000"/>
-                <a:lumOff val="60000"/>
-                <a:alpha val="40000"/>
-              </a:schemeClr>
-            </a:solidFill>
-            <a:ln w="12700">
-              <a:noFill/>
-            </a:ln>
-            <a:effectLst>
-              <a:softEdge rad="12700"/>
-            </a:effectLst>
-          </p:spPr>
-          <p:style>
-            <a:lnRef idx="2">
-              <a:schemeClr val="accent1">
-                <a:shade val="50000"/>
-              </a:schemeClr>
-            </a:lnRef>
-            <a:fillRef idx="1">
-              <a:schemeClr val="accent1"/>
-            </a:fillRef>
-            <a:effectRef idx="0">
-              <a:schemeClr val="accent1"/>
-            </a:effectRef>
-            <a:fontRef idx="minor">
-              <a:schemeClr val="lt1"/>
-            </a:fontRef>
-          </p:style>
-          <p:txBody>
-            <a:bodyPr rtlCol="0" anchor="t"/>
-            <a:lstStyle/>
-            <a:p>
-              <a:pPr algn="ctr"/>
-              <a:r>
-                <a:rPr lang="en-US" altLang="ko-KR" sz="1100" b="1" dirty="0">
-                  <a:solidFill>
-                    <a:schemeClr val="tx1">
-                      <a:lumMod val="85000"/>
-                      <a:lumOff val="15000"/>
-                    </a:schemeClr>
-                  </a:solidFill>
-                  <a:latin typeface="Pretendard SemiBold" panose="02000703000000020004" pitchFamily="50" charset="-127"/>
-                  <a:ea typeface="Pretendard SemiBold" panose="02000703000000020004" pitchFamily="50" charset="-127"/>
-                  <a:cs typeface="Pretendard SemiBold" panose="02000703000000020004" pitchFamily="50" charset="-127"/>
-                </a:rPr>
-                <a:t>Patch Manager</a:t>
-              </a:r>
-            </a:p>
-          </p:txBody>
-        </p:sp>
-        <p:sp>
-          <p:nvSpPr>
-            <p:cNvPr id="10" name="직사각형 9">
-              <a:extLst>
-                <a:ext uri="{FF2B5EF4-FFF2-40B4-BE49-F238E27FC236}">
-                  <a16:creationId xmlns:a16="http://schemas.microsoft.com/office/drawing/2014/main" id="{5808C6C3-9339-FB27-D784-3BDF80F90D2D}"/>
-                </a:ext>
-              </a:extLst>
-            </p:cNvPr>
-            <p:cNvSpPr/>
-            <p:nvPr/>
-          </p:nvSpPr>
-          <p:spPr>
-            <a:xfrm>
-              <a:off x="3427082" y="1379126"/>
-              <a:ext cx="1331225" cy="2054908"/>
-            </a:xfrm>
-            <a:prstGeom prst="rect">
-              <a:avLst/>
-            </a:prstGeom>
-            <a:solidFill>
-              <a:schemeClr val="accent4">
-                <a:lumMod val="20000"/>
-                <a:lumOff val="80000"/>
-                <a:alpha val="35000"/>
-              </a:schemeClr>
-            </a:solidFill>
-            <a:ln>
-              <a:noFill/>
-            </a:ln>
-            <a:effectLst>
-              <a:softEdge rad="31750"/>
-            </a:effectLst>
-          </p:spPr>
-          <p:style>
-            <a:lnRef idx="2">
-              <a:schemeClr val="accent1">
-                <a:shade val="50000"/>
-              </a:schemeClr>
-            </a:lnRef>
-            <a:fillRef idx="1">
-              <a:schemeClr val="accent1"/>
-            </a:fillRef>
-            <a:effectRef idx="0">
-              <a:schemeClr val="accent1"/>
-            </a:effectRef>
-            <a:fontRef idx="minor">
-              <a:schemeClr val="lt1"/>
-            </a:fontRef>
-          </p:style>
-          <p:txBody>
-            <a:bodyPr rtlCol="0" anchor="t"/>
-            <a:lstStyle/>
-            <a:p>
-              <a:pPr algn="ctr"/>
-              <a:r>
-                <a:rPr lang="en-US" altLang="ko-KR" sz="1100" b="1" dirty="0">
-                  <a:solidFill>
-                    <a:schemeClr val="tx1">
-                      <a:lumMod val="85000"/>
-                      <a:lumOff val="15000"/>
-                    </a:schemeClr>
-                  </a:solidFill>
-                  <a:latin typeface="Pretendard SemiBold" panose="02000703000000020004" pitchFamily="50" charset="-127"/>
-                  <a:ea typeface="Pretendard SemiBold" panose="02000703000000020004" pitchFamily="50" charset="-127"/>
-                  <a:cs typeface="Pretendard SemiBold" panose="02000703000000020004" pitchFamily="50" charset="-127"/>
-                </a:rPr>
-                <a:t>Client</a:t>
-              </a:r>
-              <a:endParaRPr lang="ko-KR" altLang="en-US" sz="1100" b="1" dirty="0">
-                <a:solidFill>
-                  <a:schemeClr val="tx1">
-                    <a:lumMod val="85000"/>
-                    <a:lumOff val="15000"/>
-                  </a:schemeClr>
-                </a:solidFill>
-                <a:latin typeface="Pretendard SemiBold" panose="02000703000000020004" pitchFamily="50" charset="-127"/>
-                <a:ea typeface="Pretendard SemiBold" panose="02000703000000020004" pitchFamily="50" charset="-127"/>
-                <a:cs typeface="Pretendard SemiBold" panose="02000703000000020004" pitchFamily="50" charset="-127"/>
-              </a:endParaRPr>
-            </a:p>
-          </p:txBody>
-        </p:sp>
-        <p:sp>
-          <p:nvSpPr>
-            <p:cNvPr id="11" name="직사각형 10">
-              <a:extLst>
-                <a:ext uri="{FF2B5EF4-FFF2-40B4-BE49-F238E27FC236}">
-                  <a16:creationId xmlns:a16="http://schemas.microsoft.com/office/drawing/2014/main" id="{C8A7CCDD-3C0C-5A56-9F28-C6D98BE1145B}"/>
-                </a:ext>
-              </a:extLst>
-            </p:cNvPr>
-            <p:cNvSpPr/>
-            <p:nvPr/>
-          </p:nvSpPr>
-          <p:spPr>
-            <a:xfrm>
-              <a:off x="3602246" y="2230488"/>
-              <a:ext cx="992468" cy="471409"/>
-            </a:xfrm>
-            <a:prstGeom prst="rect">
-              <a:avLst/>
-            </a:prstGeom>
-            <a:solidFill>
-              <a:schemeClr val="accent4">
-                <a:lumMod val="40000"/>
-                <a:lumOff val="60000"/>
-                <a:alpha val="40000"/>
-              </a:schemeClr>
-            </a:solidFill>
-            <a:ln>
-              <a:solidFill>
-                <a:schemeClr val="tx1"/>
-              </a:solidFill>
-            </a:ln>
-            <a:effectLst>
-              <a:softEdge rad="0"/>
-            </a:effectLst>
-          </p:spPr>
-          <p:style>
-            <a:lnRef idx="2">
-              <a:schemeClr val="accent1">
-                <a:shade val="50000"/>
-              </a:schemeClr>
-            </a:lnRef>
-            <a:fillRef idx="1">
-              <a:schemeClr val="accent1"/>
-            </a:fillRef>
-            <a:effectRef idx="0">
-              <a:schemeClr val="accent1"/>
-            </a:effectRef>
-            <a:fontRef idx="minor">
-              <a:schemeClr val="lt1"/>
-            </a:fontRef>
-          </p:style>
-          <p:txBody>
-            <a:bodyPr rtlCol="0" anchor="ctr"/>
-            <a:lstStyle/>
-            <a:p>
-              <a:pPr algn="ctr"/>
-              <a:r>
-                <a:rPr lang="en-US" altLang="ko-KR" sz="1050" dirty="0">
-                  <a:solidFill>
-                    <a:schemeClr val="tx1"/>
-                  </a:solidFill>
-                  <a:latin typeface="Pretendard SemiBold" panose="02000703000000020004" pitchFamily="50" charset="-127"/>
-                  <a:ea typeface="Pretendard SemiBold" panose="02000703000000020004" pitchFamily="50" charset="-127"/>
-                  <a:cs typeface="Pretendard SemiBold" panose="02000703000000020004" pitchFamily="50" charset="-127"/>
-                </a:rPr>
-                <a:t>Web Console</a:t>
-              </a:r>
-              <a:endParaRPr lang="ko-KR" altLang="en-US" sz="1050" dirty="0">
-                <a:solidFill>
-                  <a:schemeClr val="tx1"/>
-                </a:solidFill>
-                <a:latin typeface="Pretendard SemiBold" panose="02000703000000020004" pitchFamily="50" charset="-127"/>
-                <a:ea typeface="Pretendard SemiBold" panose="02000703000000020004" pitchFamily="50" charset="-127"/>
-                <a:cs typeface="Pretendard SemiBold" panose="02000703000000020004" pitchFamily="50" charset="-127"/>
-              </a:endParaRPr>
-            </a:p>
-          </p:txBody>
-        </p:sp>
-        <p:sp>
-          <p:nvSpPr>
-            <p:cNvPr id="12" name="원통 11">
-              <a:extLst>
-                <a:ext uri="{FF2B5EF4-FFF2-40B4-BE49-F238E27FC236}">
-                  <a16:creationId xmlns:a16="http://schemas.microsoft.com/office/drawing/2014/main" id="{F705EAAC-2F42-A97F-290D-E026A423D1FD}"/>
-                </a:ext>
-              </a:extLst>
-            </p:cNvPr>
-            <p:cNvSpPr/>
-            <p:nvPr/>
-          </p:nvSpPr>
-          <p:spPr>
-            <a:xfrm>
-              <a:off x="6030713" y="4041269"/>
-              <a:ext cx="709127" cy="670700"/>
-            </a:xfrm>
-            <a:prstGeom prst="can">
-              <a:avLst/>
-            </a:prstGeom>
-            <a:solidFill>
-              <a:schemeClr val="bg2">
-                <a:lumMod val="90000"/>
-              </a:schemeClr>
-            </a:solidFill>
-            <a:ln>
-              <a:solidFill>
-                <a:schemeClr val="tx1"/>
-              </a:solidFill>
-            </a:ln>
-          </p:spPr>
-          <p:style>
-            <a:lnRef idx="2">
-              <a:schemeClr val="accent1">
-                <a:shade val="50000"/>
-              </a:schemeClr>
-            </a:lnRef>
-            <a:fillRef idx="1">
-              <a:schemeClr val="accent1"/>
-            </a:fillRef>
-            <a:effectRef idx="0">
-              <a:schemeClr val="accent1"/>
-            </a:effectRef>
-            <a:fontRef idx="minor">
-              <a:schemeClr val="lt1"/>
-            </a:fontRef>
-          </p:style>
-          <p:txBody>
-            <a:bodyPr rtlCol="0" anchor="ctr"/>
-            <a:lstStyle/>
-            <a:p>
-              <a:pPr algn="ctr"/>
-              <a:r>
-                <a:rPr lang="en-US" altLang="ko-KR" sz="1050" dirty="0">
-                  <a:solidFill>
-                    <a:schemeClr val="tx1"/>
-                  </a:solidFill>
-                  <a:latin typeface="Pretendard SemiBold" panose="02000703000000020004" pitchFamily="50" charset="-127"/>
-                  <a:ea typeface="Pretendard SemiBold" panose="02000703000000020004" pitchFamily="50" charset="-127"/>
-                  <a:cs typeface="Pretendard SemiBold" panose="02000703000000020004" pitchFamily="50" charset="-127"/>
-                </a:rPr>
-                <a:t>Task Meta</a:t>
-              </a:r>
-              <a:endParaRPr lang="ko-KR" altLang="en-US" sz="1050" dirty="0">
-                <a:solidFill>
-                  <a:schemeClr val="tx1"/>
-                </a:solidFill>
-                <a:latin typeface="Pretendard SemiBold" panose="02000703000000020004" pitchFamily="50" charset="-127"/>
-                <a:ea typeface="Pretendard SemiBold" panose="02000703000000020004" pitchFamily="50" charset="-127"/>
-                <a:cs typeface="Pretendard SemiBold" panose="02000703000000020004" pitchFamily="50" charset="-127"/>
-              </a:endParaRPr>
-            </a:p>
-          </p:txBody>
-        </p:sp>
-        <p:sp>
-          <p:nvSpPr>
-            <p:cNvPr id="13" name="직사각형 12"/>
-            <p:cNvSpPr/>
-            <p:nvPr/>
-          </p:nvSpPr>
-          <p:spPr>
-            <a:xfrm>
-              <a:off x="5576670" y="2221643"/>
-              <a:ext cx="2590027" cy="471409"/>
-            </a:xfrm>
-            <a:prstGeom prst="rect">
-              <a:avLst/>
-            </a:prstGeom>
-            <a:solidFill>
-              <a:schemeClr val="accent1">
-                <a:lumMod val="40000"/>
-                <a:lumOff val="60000"/>
-              </a:schemeClr>
-            </a:solidFill>
-            <a:ln>
-              <a:solidFill>
-                <a:schemeClr val="tx1"/>
-              </a:solidFill>
-            </a:ln>
-          </p:spPr>
-          <p:style>
-            <a:lnRef idx="2">
-              <a:schemeClr val="accent1">
-                <a:shade val="50000"/>
-              </a:schemeClr>
-            </a:lnRef>
-            <a:fillRef idx="1">
-              <a:schemeClr val="accent1"/>
-            </a:fillRef>
-            <a:effectRef idx="0">
-              <a:schemeClr val="accent1"/>
-            </a:effectRef>
-            <a:fontRef idx="minor">
-              <a:schemeClr val="lt1"/>
-            </a:fontRef>
-          </p:style>
-          <p:txBody>
-            <a:bodyPr rtlCol="0" anchor="ctr"/>
-            <a:lstStyle/>
-            <a:p>
-              <a:pPr algn="ctr"/>
-              <a:r>
-                <a:rPr lang="en-US" altLang="ko-KR" sz="1050" dirty="0">
-                  <a:solidFill>
-                    <a:schemeClr val="tx1"/>
-                  </a:solidFill>
-                  <a:latin typeface="Pretendard SemiBold" panose="02000703000000020004" pitchFamily="50" charset="-127"/>
-                  <a:ea typeface="Pretendard SemiBold" panose="02000703000000020004" pitchFamily="50" charset="-127"/>
-                  <a:cs typeface="Pretendard SemiBold" panose="02000703000000020004" pitchFamily="50" charset="-127"/>
-                </a:rPr>
-                <a:t>Task Service</a:t>
-              </a:r>
-              <a:endParaRPr lang="ko-KR" altLang="en-US" sz="1050" dirty="0">
-                <a:solidFill>
-                  <a:schemeClr val="tx1"/>
-                </a:solidFill>
-                <a:latin typeface="Pretendard SemiBold" panose="02000703000000020004" pitchFamily="50" charset="-127"/>
-                <a:ea typeface="Pretendard SemiBold" panose="02000703000000020004" pitchFamily="50" charset="-127"/>
-                <a:cs typeface="Pretendard SemiBold" panose="02000703000000020004" pitchFamily="50" charset="-127"/>
-              </a:endParaRPr>
-            </a:p>
-          </p:txBody>
-        </p:sp>
-        <p:sp>
-          <p:nvSpPr>
-            <p:cNvPr id="14" name="원통 13">
-              <a:extLst>
-                <a:ext uri="{FF2B5EF4-FFF2-40B4-BE49-F238E27FC236}">
-                  <a16:creationId xmlns:a16="http://schemas.microsoft.com/office/drawing/2014/main" id="{F705EAAC-2F42-A97F-290D-E026A423D1FD}"/>
-                </a:ext>
-              </a:extLst>
-            </p:cNvPr>
-            <p:cNvSpPr/>
-            <p:nvPr/>
-          </p:nvSpPr>
-          <p:spPr>
-            <a:xfrm>
-              <a:off x="6995224" y="4048769"/>
-              <a:ext cx="709127" cy="674277"/>
-            </a:xfrm>
-            <a:prstGeom prst="can">
-              <a:avLst/>
-            </a:prstGeom>
-            <a:solidFill>
-              <a:schemeClr val="bg2">
-                <a:lumMod val="90000"/>
-              </a:schemeClr>
-            </a:solidFill>
-            <a:ln>
-              <a:solidFill>
-                <a:schemeClr val="tx1"/>
-              </a:solidFill>
-            </a:ln>
-          </p:spPr>
-          <p:style>
-            <a:lnRef idx="2">
-              <a:schemeClr val="accent1">
-                <a:shade val="50000"/>
-              </a:schemeClr>
-            </a:lnRef>
-            <a:fillRef idx="1">
-              <a:schemeClr val="accent1"/>
-            </a:fillRef>
-            <a:effectRef idx="0">
-              <a:schemeClr val="accent1"/>
-            </a:effectRef>
-            <a:fontRef idx="minor">
-              <a:schemeClr val="lt1"/>
-            </a:fontRef>
-          </p:style>
-          <p:txBody>
-            <a:bodyPr rtlCol="0" anchor="ctr"/>
-            <a:lstStyle/>
-            <a:p>
-              <a:pPr algn="ctr"/>
-              <a:r>
-                <a:rPr lang="en-US" altLang="ko-KR" sz="1050" dirty="0">
-                  <a:solidFill>
-                    <a:schemeClr val="tx1"/>
-                  </a:solidFill>
-                  <a:latin typeface="Pretendard SemiBold" panose="02000703000000020004" pitchFamily="50" charset="-127"/>
-                  <a:ea typeface="Pretendard SemiBold" panose="02000703000000020004" pitchFamily="50" charset="-127"/>
-                  <a:cs typeface="Pretendard SemiBold" panose="02000703000000020004" pitchFamily="50" charset="-127"/>
-                </a:rPr>
-                <a:t>Task Status</a:t>
-              </a:r>
-              <a:endParaRPr lang="ko-KR" altLang="en-US" sz="1050" dirty="0">
-                <a:solidFill>
-                  <a:schemeClr val="tx1"/>
-                </a:solidFill>
-                <a:latin typeface="Pretendard SemiBold" panose="02000703000000020004" pitchFamily="50" charset="-127"/>
-                <a:ea typeface="Pretendard SemiBold" panose="02000703000000020004" pitchFamily="50" charset="-127"/>
-                <a:cs typeface="Pretendard SemiBold" panose="02000703000000020004" pitchFamily="50" charset="-127"/>
-              </a:endParaRPr>
-            </a:p>
-          </p:txBody>
-        </p:sp>
-        <p:cxnSp>
-          <p:nvCxnSpPr>
-            <p:cNvPr id="15" name="직선 화살표 연결선 14"/>
-            <p:cNvCxnSpPr/>
-            <p:nvPr/>
-          </p:nvCxnSpPr>
-          <p:spPr>
-            <a:xfrm>
-              <a:off x="4594714" y="2415076"/>
-              <a:ext cx="1008627" cy="0"/>
-            </a:xfrm>
-            <a:prstGeom prst="straightConnector1">
-              <a:avLst/>
-            </a:prstGeom>
-            <a:ln w="50800">
-              <a:tailEnd type="triangle"/>
-            </a:ln>
-          </p:spPr>
-          <p:style>
-            <a:lnRef idx="1">
-              <a:schemeClr val="dk1"/>
-            </a:lnRef>
-            <a:fillRef idx="0">
-              <a:schemeClr val="dk1"/>
-            </a:fillRef>
-            <a:effectRef idx="0">
-              <a:schemeClr val="dk1"/>
-            </a:effectRef>
-            <a:fontRef idx="minor">
-              <a:schemeClr val="tx1"/>
-            </a:fontRef>
-          </p:style>
-        </p:cxnSp>
-        <p:cxnSp>
-          <p:nvCxnSpPr>
-            <p:cNvPr id="16" name="직선 화살표 연결선 15"/>
-            <p:cNvCxnSpPr/>
-            <p:nvPr/>
-          </p:nvCxnSpPr>
-          <p:spPr>
-            <a:xfrm>
-              <a:off x="4594714" y="2535404"/>
-              <a:ext cx="1008627" cy="0"/>
-            </a:xfrm>
-            <a:prstGeom prst="straightConnector1">
-              <a:avLst/>
-            </a:prstGeom>
-            <a:ln w="50800">
-              <a:headEnd type="triangle"/>
-              <a:tailEnd type="none"/>
-            </a:ln>
-          </p:spPr>
-          <p:style>
-            <a:lnRef idx="1">
-              <a:schemeClr val="dk1"/>
-            </a:lnRef>
-            <a:fillRef idx="0">
-              <a:schemeClr val="dk1"/>
-            </a:fillRef>
-            <a:effectRef idx="0">
-              <a:schemeClr val="dk1"/>
-            </a:effectRef>
-            <a:fontRef idx="minor">
-              <a:schemeClr val="tx1"/>
-            </a:fontRef>
-          </p:style>
-        </p:cxnSp>
-        <p:cxnSp>
-          <p:nvCxnSpPr>
-            <p:cNvPr id="17" name="직선 화살표 연결선 16"/>
-            <p:cNvCxnSpPr/>
-            <p:nvPr/>
-          </p:nvCxnSpPr>
-          <p:spPr>
-            <a:xfrm flipH="1">
-              <a:off x="6331783" y="2688862"/>
-              <a:ext cx="2" cy="1339372"/>
-            </a:xfrm>
-            <a:prstGeom prst="straightConnector1">
-              <a:avLst/>
-            </a:prstGeom>
-            <a:ln w="50800">
-              <a:headEnd type="triangle" w="med" len="sm"/>
-              <a:tailEnd type="none"/>
-            </a:ln>
-          </p:spPr>
-          <p:style>
-            <a:lnRef idx="1">
-              <a:schemeClr val="dk1"/>
-            </a:lnRef>
-            <a:fillRef idx="0">
-              <a:schemeClr val="dk1"/>
-            </a:fillRef>
-            <a:effectRef idx="0">
-              <a:schemeClr val="dk1"/>
-            </a:effectRef>
-            <a:fontRef idx="minor">
-              <a:schemeClr val="tx1"/>
-            </a:fontRef>
-          </p:style>
-        </p:cxnSp>
-        <p:cxnSp>
-          <p:nvCxnSpPr>
-            <p:cNvPr id="18" name="직선 화살표 연결선 17"/>
-            <p:cNvCxnSpPr/>
-            <p:nvPr/>
-          </p:nvCxnSpPr>
-          <p:spPr>
-            <a:xfrm flipH="1">
-              <a:off x="7389919" y="2701897"/>
-              <a:ext cx="36" cy="1346872"/>
-            </a:xfrm>
-            <a:prstGeom prst="straightConnector1">
-              <a:avLst/>
-            </a:prstGeom>
-            <a:ln w="50800">
-              <a:headEnd type="triangle" w="med" len="sm"/>
-              <a:tailEnd type="none"/>
-            </a:ln>
-          </p:spPr>
-          <p:style>
-            <a:lnRef idx="1">
-              <a:schemeClr val="dk1"/>
-            </a:lnRef>
-            <a:fillRef idx="0">
-              <a:schemeClr val="dk1"/>
-            </a:fillRef>
-            <a:effectRef idx="0">
-              <a:schemeClr val="dk1"/>
-            </a:effectRef>
-            <a:fontRef idx="minor">
-              <a:schemeClr val="tx1"/>
-            </a:fontRef>
-          </p:style>
-        </p:cxnSp>
-        <p:sp>
-          <p:nvSpPr>
-            <p:cNvPr id="19" name="TextBox 18"/>
-            <p:cNvSpPr txBox="1"/>
-            <p:nvPr/>
-          </p:nvSpPr>
-          <p:spPr>
-            <a:xfrm>
-              <a:off x="4743713" y="2133033"/>
-              <a:ext cx="1098356" cy="253916"/>
-            </a:xfrm>
-            <a:prstGeom prst="rect">
-              <a:avLst/>
-            </a:prstGeom>
-            <a:noFill/>
-            <a:ln>
-              <a:noFill/>
-            </a:ln>
-          </p:spPr>
-          <p:txBody>
-            <a:bodyPr wrap="square" rtlCol="0">
-              <a:spAutoFit/>
-            </a:bodyPr>
-            <a:lstStyle/>
-            <a:p>
-              <a:r>
-                <a:rPr lang="ko-KR" altLang="en-US" sz="1050" dirty="0">
-                  <a:latin typeface="Pretendard SemiBold" panose="02000703000000020004" pitchFamily="50" charset="-127"/>
-                  <a:ea typeface="Pretendard SemiBold" panose="02000703000000020004" pitchFamily="50" charset="-127"/>
-                  <a:cs typeface="Pretendard SemiBold" panose="02000703000000020004" pitchFamily="50" charset="-127"/>
-                </a:rPr>
-                <a:t>조회 요청</a:t>
-              </a:r>
-            </a:p>
-          </p:txBody>
-        </p:sp>
-        <p:sp>
-          <p:nvSpPr>
-            <p:cNvPr id="20" name="TextBox 19"/>
-            <p:cNvSpPr txBox="1"/>
-            <p:nvPr/>
-          </p:nvSpPr>
-          <p:spPr>
-            <a:xfrm>
-              <a:off x="5306478" y="2963361"/>
-              <a:ext cx="1098356" cy="415498"/>
-            </a:xfrm>
-            <a:prstGeom prst="rect">
-              <a:avLst/>
-            </a:prstGeom>
-            <a:noFill/>
-            <a:ln>
-              <a:noFill/>
-            </a:ln>
-          </p:spPr>
-          <p:txBody>
-            <a:bodyPr wrap="square" rtlCol="0">
-              <a:spAutoFit/>
-            </a:bodyPr>
-            <a:lstStyle/>
-            <a:p>
-              <a:r>
-                <a:rPr lang="ko-KR" altLang="en-US" sz="1050" dirty="0">
-                  <a:latin typeface="Pretendard SemiBold" panose="02000703000000020004" pitchFamily="50" charset="-127"/>
-                  <a:ea typeface="Pretendard SemiBold" panose="02000703000000020004" pitchFamily="50" charset="-127"/>
-                  <a:cs typeface="Pretendard SemiBold" panose="02000703000000020004" pitchFamily="50" charset="-127"/>
-                </a:rPr>
-                <a:t>메타 정보와 상태 정보 조합</a:t>
-              </a:r>
-            </a:p>
-          </p:txBody>
-        </p:sp>
-      </p:grpSp>
-      <p:sp>
-        <p:nvSpPr>
-          <p:cNvPr id="21" name="CICD">
-            <a:extLst>
-              <a:ext uri="{FF2B5EF4-FFF2-40B4-BE49-F238E27FC236}">
-                <a16:creationId xmlns:a16="http://schemas.microsoft.com/office/drawing/2014/main" id="{762B2A58-EB2E-992F-01DA-15C50B338CB6}"/>
-              </a:ext>
-            </a:extLst>
-          </p:cNvPr>
-          <p:cNvSpPr/>
-          <p:nvPr/>
-        </p:nvSpPr>
-        <p:spPr>
-          <a:xfrm>
-            <a:off x="2406650" y="5476377"/>
-            <a:ext cx="7378700" cy="666750"/>
-          </a:xfrm>
-          <a:prstGeom prst="rect">
-            <a:avLst/>
-          </a:prstGeom>
-          <a:noFill/>
-          <a:ln/>
-        </p:spPr>
-        <p:txBody>
-          <a:bodyPr wrap="square" lIns="0" tIns="0" rIns="0" bIns="0" rtlCol="0" anchor="t"/>
-          <a:lstStyle/>
-          <a:p>
-            <a:pPr algn="ctr">
-              <a:lnSpc>
-                <a:spcPct val="150000"/>
-              </a:lnSpc>
-            </a:pPr>
-            <a:r>
-              <a:rPr lang="ko-KR" altLang="en-US" sz="1100" dirty="0">
-                <a:latin typeface="Pretendard SemiBold" panose="02000703000000020004" pitchFamily="50" charset="-127"/>
-                <a:ea typeface="Pretendard SemiBold" panose="02000703000000020004" pitchFamily="50" charset="-127"/>
-                <a:cs typeface="Pretendard SemiBold" panose="02000703000000020004" pitchFamily="50" charset="-127"/>
-              </a:rPr>
-              <a:t>패치 작업의 계획과 현재 패치 진행 상황을 별도의 대조 작업 없이 조회 가능</a:t>
-            </a:r>
-            <a:endParaRPr lang="en-US" sz="1100" dirty="0">
-              <a:latin typeface="Pretendard SemiBold" panose="02000703000000020004" pitchFamily="50" charset="-127"/>
-              <a:ea typeface="Pretendard SemiBold" panose="02000703000000020004" pitchFamily="50" charset="-127"/>
-              <a:cs typeface="Pretendard SemiBold" panose="02000703000000020004" pitchFamily="50" charset="-127"/>
-            </a:endParaRPr>
-          </a:p>
-        </p:txBody>
-      </p:sp>
-      <p:sp>
-        <p:nvSpPr>
-          <p:cNvPr id="24" name="Key Feature">
-            <a:extLst>
-              <a:ext uri="{FF2B5EF4-FFF2-40B4-BE49-F238E27FC236}">
-                <a16:creationId xmlns:a16="http://schemas.microsoft.com/office/drawing/2014/main" id="{047F6C8F-C776-7F0F-DAFE-29B85ACC1B0A}"/>
-              </a:ext>
-            </a:extLst>
-          </p:cNvPr>
-          <p:cNvSpPr/>
-          <p:nvPr/>
-        </p:nvSpPr>
-        <p:spPr>
-          <a:xfrm>
-            <a:off x="444499" y="285750"/>
-            <a:ext cx="4112163" cy="311150"/>
-          </a:xfrm>
-          <a:prstGeom prst="rect">
-            <a:avLst/>
-          </a:prstGeom>
-          <a:noFill/>
-          <a:ln/>
-        </p:spPr>
-        <p:txBody>
-          <a:bodyPr wrap="square" lIns="0" tIns="0" rIns="0" bIns="0" rtlCol="0" anchor="t"/>
-          <a:lstStyle/>
-          <a:p>
-            <a:pPr>
-              <a:lnSpc>
-                <a:spcPct val="108333"/>
-              </a:lnSpc>
-            </a:pPr>
-            <a:r>
-              <a:rPr lang="ko-KR" altLang="en-US" sz="1900" dirty="0">
-                <a:latin typeface="Pretendard SemiBold" panose="02000703000000020004" pitchFamily="50" charset="-127"/>
-                <a:ea typeface="Pretendard SemiBold" panose="02000703000000020004" pitchFamily="50" charset="-127"/>
-                <a:cs typeface="Pretendard SemiBold" panose="02000703000000020004" pitchFamily="50" charset="-127"/>
-              </a:rPr>
-              <a:t>패치 작업 조회</a:t>
-            </a:r>
-            <a:endParaRPr lang="en-US" altLang="ko-Kore-KR" sz="1900" dirty="0">
-              <a:latin typeface="Pretendard SemiBold" panose="02000703000000020004" pitchFamily="50" charset="-127"/>
-              <a:ea typeface="Pretendard SemiBold" panose="02000703000000020004" pitchFamily="50" charset="-127"/>
-              <a:cs typeface="Pretendard SemiBold" panose="02000703000000020004" pitchFamily="50" charset="-127"/>
-            </a:endParaRPr>
-          </a:p>
-        </p:txBody>
-      </p:sp>
-    </p:spTree>
-    <p:extLst>
-      <p:ext uri="{BB962C8B-B14F-4D97-AF65-F5344CB8AC3E}">
-        <p14:creationId xmlns:p14="http://schemas.microsoft.com/office/powerpoint/2010/main" val="3589141187"/>
-      </p:ext>
-    </p:extLst>
-  </p:cSld>
-  <p:clrMapOvr>
-    <a:masterClrMapping/>
-  </p:clrMapOvr>
-</p:sld>
-</file>
-
-<file path=ppt/slides/slide2.xml><?xml version="1.0" encoding="utf-8"?>
 <p:sld xmlns:a="http://schemas.openxmlformats.org/drawingml/2006/main" xmlns:r="http://schemas.openxmlformats.org/officeDocument/2006/relationships" xmlns:p="http://schemas.openxmlformats.org/presentationml/2006/main">
   <p:cSld>
     <p:spTree>

--- a/feature-slice/09a-document-code-gap/document-code-gap.pptx
+++ b/feature-slice/09a-document-code-gap/document-code-gap.pptx
@@ -203,7 +203,7 @@
           <a:p>
             <a:fld id="{1CFE36D4-B224-4D49-A73E-0BF1A210728E}" type="datetimeFigureOut">
               <a:rPr lang="ko-KR" altLang="en-US" smtClean="0"/>
-              <a:t>2026. 4. 13.</a:t>
+              <a:t>2026. 4. 16.</a:t>
             </a:fld>
             <a:endParaRPr lang="ko-KR" altLang="en-US"/>
           </a:p>
@@ -368,7 +368,7 @@
           <a:p>
             <a:fld id="{79F7304B-F283-4E41-A8FA-EB923FFBA2A0}" type="datetimeFigureOut">
               <a:rPr lang="ko-KR" altLang="en-US" smtClean="0"/>
-              <a:t>2026. 4. 13.</a:t>
+              <a:t>2026. 4. 16.</a:t>
             </a:fld>
             <a:endParaRPr lang="ko-KR" altLang="en-US"/>
           </a:p>
@@ -1459,7 +1459,7 @@
             <a:fld id="{A08F8EB2-BEDB-4375-BAD0-E61FA200F7A6}" type="datetimeFigureOut">
               <a:rPr lang="ko-KR" altLang="en-US" smtClean="0"/>
               <a:pPr/>
-              <a:t>2026. 4. 13.</a:t>
+              <a:t>2026. 4. 16.</a:t>
             </a:fld>
             <a:endParaRPr lang="ko-KR" altLang="en-US"/>
           </a:p>
@@ -2251,8 +2251,8 @@
         </p:nvSpPr>
         <p:spPr>
           <a:xfrm>
-            <a:off x="2781566" y="2954309"/>
-            <a:ext cx="2668714" cy="1412084"/>
+            <a:off x="2781999" y="2649268"/>
+            <a:ext cx="2668714" cy="1183714"/>
           </a:xfrm>
           <a:prstGeom prst="rect">
             <a:avLst/>
@@ -2318,7 +2318,7 @@
         </p:nvSpPr>
         <p:spPr>
           <a:xfrm>
-            <a:off x="2990571" y="3376886"/>
+            <a:off x="2983248" y="2881747"/>
             <a:ext cx="2244365" cy="773315"/>
           </a:xfrm>
           <a:prstGeom prst="rect">
@@ -2475,7 +2475,7 @@
         </p:nvSpPr>
         <p:spPr>
           <a:xfrm>
-            <a:off x="7065526" y="2745050"/>
+            <a:off x="7065526" y="2482579"/>
             <a:ext cx="4820893" cy="2036992"/>
           </a:xfrm>
           <a:prstGeom prst="rect">
@@ -2542,7 +2542,7 @@
         </p:nvSpPr>
         <p:spPr>
           <a:xfrm>
-            <a:off x="10248478" y="3060256"/>
+            <a:off x="10248478" y="2797785"/>
             <a:ext cx="1499294" cy="617883"/>
           </a:xfrm>
           <a:prstGeom prst="can">
@@ -2681,7 +2681,7 @@
         </p:nvSpPr>
         <p:spPr>
           <a:xfrm>
-            <a:off x="10248477" y="3851706"/>
+            <a:off x="10248477" y="3589235"/>
             <a:ext cx="1499295" cy="617882"/>
           </a:xfrm>
           <a:prstGeom prst="can">
@@ -2790,7 +2790,7 @@
         </p:nvSpPr>
         <p:spPr>
           <a:xfrm>
-            <a:off x="7223662" y="3369197"/>
+            <a:off x="7223662" y="3106726"/>
             <a:ext cx="1769748" cy="791967"/>
           </a:xfrm>
           <a:prstGeom prst="rect">
@@ -2911,8 +2911,8 @@
         </p:nvSpPr>
         <p:spPr>
           <a:xfrm>
-            <a:off x="3231227" y="4845113"/>
-            <a:ext cx="1740632" cy="1213030"/>
+            <a:off x="3225188" y="4044850"/>
+            <a:ext cx="1740632" cy="1183714"/>
           </a:xfrm>
           <a:prstGeom prst="rect">
             <a:avLst/>
@@ -2978,7 +2978,7 @@
         </p:nvSpPr>
         <p:spPr>
           <a:xfrm>
-            <a:off x="3422315" y="5155171"/>
+            <a:off x="3433210" y="4312573"/>
             <a:ext cx="1344442" cy="791967"/>
           </a:xfrm>
           <a:prstGeom prst="rect">
@@ -3435,13 +3435,13 @@
         </p:nvCxnSpPr>
         <p:spPr>
           <a:xfrm rot="10800000" flipH="1">
-            <a:off x="2990570" y="1917248"/>
-            <a:ext cx="2863153" cy="1846297"/>
+            <a:off x="2983248" y="1917247"/>
+            <a:ext cx="2870476" cy="1351158"/>
           </a:xfrm>
           <a:prstGeom prst="bentConnector4">
             <a:avLst>
-              <a:gd name="adj1" fmla="val -16040"/>
-              <a:gd name="adj2" fmla="val 60471"/>
+              <a:gd name="adj1" fmla="val -10619"/>
+              <a:gd name="adj2" fmla="val 62428"/>
             </a:avLst>
           </a:prstGeom>
           <a:ln w="3175">
@@ -3482,7 +3482,7 @@
         </p:nvSpPr>
         <p:spPr>
           <a:xfrm>
-            <a:off x="3382066" y="2431623"/>
+            <a:off x="3382066" y="2427278"/>
             <a:ext cx="1852870" cy="215444"/>
           </a:xfrm>
           <a:prstGeom prst="rect">
@@ -3528,7 +3528,7 @@
         </p:nvCxnSpPr>
         <p:spPr>
           <a:xfrm flipV="1">
-            <a:off x="5234936" y="3607142"/>
+            <a:off x="5227613" y="3284973"/>
             <a:ext cx="1987861" cy="0"/>
           </a:xfrm>
           <a:prstGeom prst="straightConnector1">
@@ -3572,7 +3572,7 @@
         </p:nvSpPr>
         <p:spPr>
           <a:xfrm>
-            <a:off x="5451145" y="3147470"/>
+            <a:off x="5404664" y="2819447"/>
             <a:ext cx="1548078" cy="461665"/>
           </a:xfrm>
           <a:prstGeom prst="rect">
@@ -3634,7 +3634,7 @@
         </p:nvCxnSpPr>
         <p:spPr>
           <a:xfrm flipV="1">
-            <a:off x="5234936" y="3941501"/>
+            <a:off x="5227613" y="3451256"/>
             <a:ext cx="1987861" cy="0"/>
           </a:xfrm>
           <a:prstGeom prst="straightConnector1">
@@ -3678,7 +3678,7 @@
         </p:nvSpPr>
         <p:spPr>
           <a:xfrm>
-            <a:off x="5698876" y="3950855"/>
+            <a:off x="5652395" y="3467411"/>
             <a:ext cx="1052616" cy="215444"/>
           </a:xfrm>
           <a:prstGeom prst="rect">
@@ -3717,7 +3717,7 @@
         </p:nvCxnSpPr>
         <p:spPr>
           <a:xfrm rot="5400000" flipH="1" flipV="1">
-            <a:off x="9107945" y="2228666"/>
+            <a:off x="9107945" y="1966195"/>
             <a:ext cx="141122" cy="2139941"/>
           </a:xfrm>
           <a:prstGeom prst="bentConnector2">
@@ -3764,7 +3764,7 @@
         </p:nvCxnSpPr>
         <p:spPr>
           <a:xfrm rot="16200000" flipH="1">
-            <a:off x="9107945" y="3161754"/>
+            <a:off x="9107945" y="2899283"/>
             <a:ext cx="141122" cy="2139941"/>
           </a:xfrm>
           <a:prstGeom prst="bentConnector2">
@@ -3808,7 +3808,7 @@
         </p:nvSpPr>
         <p:spPr>
           <a:xfrm>
-            <a:off x="8483042" y="4320058"/>
+            <a:off x="8483042" y="4057587"/>
             <a:ext cx="1176442" cy="338554"/>
           </a:xfrm>
           <a:prstGeom prst="rect">
@@ -3854,7 +3854,7 @@
         </p:nvCxnSpPr>
         <p:spPr>
           <a:xfrm>
-            <a:off x="8993410" y="3537017"/>
+            <a:off x="8993410" y="3274546"/>
             <a:ext cx="1255067" cy="0"/>
           </a:xfrm>
           <a:prstGeom prst="straightConnector1">
@@ -3898,7 +3898,7 @@
         </p:nvSpPr>
         <p:spPr>
           <a:xfrm>
-            <a:off x="8444502" y="3012630"/>
+            <a:off x="8444502" y="2750159"/>
             <a:ext cx="1176442" cy="215444"/>
           </a:xfrm>
           <a:prstGeom prst="rect">
@@ -3934,7 +3934,7 @@
         </p:nvSpPr>
         <p:spPr>
           <a:xfrm>
-            <a:off x="9144294" y="3323191"/>
+            <a:off x="9144294" y="3060720"/>
             <a:ext cx="852763" cy="215444"/>
           </a:xfrm>
           <a:prstGeom prst="rect">
@@ -3973,13 +3973,13 @@
         </p:nvCxnSpPr>
         <p:spPr>
           <a:xfrm rot="5400000">
-            <a:off x="2824869" y="4747647"/>
-            <a:ext cx="1400954" cy="206062"/>
+            <a:off x="2973933" y="4118168"/>
+            <a:ext cx="1049666" cy="131112"/>
           </a:xfrm>
           <a:prstGeom prst="bentConnector4">
             <a:avLst>
-              <a:gd name="adj1" fmla="val 35867"/>
-              <a:gd name="adj2" fmla="val 314878"/>
+              <a:gd name="adj1" fmla="val 27105"/>
+              <a:gd name="adj2" fmla="val 351846"/>
             </a:avLst>
           </a:prstGeom>
           <a:ln w="3175">
@@ -4023,13 +4023,13 @@
         </p:nvCxnSpPr>
         <p:spPr>
           <a:xfrm flipH="1" flipV="1">
-            <a:off x="4524879" y="4150201"/>
-            <a:ext cx="241878" cy="1400954"/>
+            <a:off x="4539734" y="3658891"/>
+            <a:ext cx="237918" cy="1049666"/>
           </a:xfrm>
           <a:prstGeom prst="bentConnector4">
             <a:avLst>
-              <a:gd name="adj1" fmla="val -172843"/>
-              <a:gd name="adj2" fmla="val 64133"/>
+              <a:gd name="adj1" fmla="val -128112"/>
+              <a:gd name="adj2" fmla="val 73702"/>
             </a:avLst>
           </a:prstGeom>
           <a:ln w="3175">
@@ -4070,7 +4070,7 @@
         </p:nvSpPr>
         <p:spPr>
           <a:xfrm>
-            <a:off x="1838049" y="4915674"/>
+            <a:off x="1948680" y="4179622"/>
             <a:ext cx="1204928" cy="338554"/>
           </a:xfrm>
           <a:prstGeom prst="rect">
@@ -4114,7 +4114,7 @@
         </p:nvSpPr>
         <p:spPr>
           <a:xfrm>
-            <a:off x="5106236" y="4944301"/>
+            <a:off x="5023938" y="4185121"/>
             <a:ext cx="1204928" cy="215444"/>
           </a:xfrm>
           <a:prstGeom prst="rect">
@@ -4132,6 +4132,113 @@
             <a:r>
               <a:rPr kumimoji="1" lang="ko-KR" altLang="en-US" sz="800" dirty="0"/>
               <a:t>갭 리포트 초안 반환</a:t>
+            </a:r>
+          </a:p>
+        </p:txBody>
+      </p:sp>
+      <p:sp>
+        <p:nvSpPr>
+          <p:cNvPr id="42" name="직사각형 41">
+            <a:extLst>
+              <a:ext uri="{FF2B5EF4-FFF2-40B4-BE49-F238E27FC236}">
+                <a16:creationId xmlns:a16="http://schemas.microsoft.com/office/drawing/2014/main" id="{9E85EE75-ECD2-B39E-5966-471F15C458C9}"/>
+              </a:ext>
+            </a:extLst>
+          </p:cNvPr>
+          <p:cNvSpPr/>
+          <p:nvPr/>
+        </p:nvSpPr>
+        <p:spPr>
+          <a:xfrm>
+            <a:off x="2158386" y="5457560"/>
+            <a:ext cx="8897946" cy="523220"/>
+          </a:xfrm>
+          <a:prstGeom prst="rect">
+            <a:avLst/>
+          </a:prstGeom>
+        </p:spPr>
+        <p:txBody>
+          <a:bodyPr wrap="square">
+            <a:spAutoFit/>
+          </a:bodyPr>
+          <a:lstStyle/>
+          <a:p>
+            <a:pPr algn="ctr"/>
+            <a:r>
+              <a:rPr lang="ko-KR" altLang="en-US" sz="1400" b="1" dirty="0"/>
+              <a:t>문서</a:t>
+            </a:r>
+            <a:r>
+              <a:rPr lang="en-US" altLang="ko-KR" sz="1400" b="1" dirty="0"/>
+              <a:t>-</a:t>
+            </a:r>
+            <a:r>
+              <a:rPr lang="ko-KR" altLang="en-US" sz="1400" b="1" dirty="0"/>
+              <a:t>코드 관계 그래프와 비즈니스 규칙 카탈로그로 문서</a:t>
+            </a:r>
+            <a:r>
+              <a:rPr lang="en-US" altLang="ko-KR" sz="1400" b="1" dirty="0"/>
+              <a:t>-</a:t>
+            </a:r>
+            <a:r>
+              <a:rPr lang="ko-KR" altLang="en-US" sz="1400" b="1" dirty="0"/>
+              <a:t>코드 불일치를 탐지</a:t>
+            </a:r>
+            <a:r>
+              <a:rPr lang="en-US" altLang="ko-KR" sz="1400" b="1" dirty="0"/>
+              <a:t>,</a:t>
+            </a:r>
+            <a:r>
+              <a:rPr lang="ko-KR" altLang="en-US" sz="1400" b="1" dirty="0"/>
+              <a:t> 분류하는 기능 제공</a:t>
+            </a:r>
+            <a:endParaRPr lang="en-US" altLang="ko-KR" sz="1400" b="1" dirty="0"/>
+          </a:p>
+          <a:p>
+            <a:pPr algn="ctr"/>
+            <a:r>
+              <a:rPr lang="en-US" altLang="ko-KR" sz="1400" b="1" dirty="0"/>
+              <a:t>  </a:t>
+            </a:r>
+            <a:r>
+              <a:rPr lang="ko-KR" altLang="en-US" sz="1400" b="1" dirty="0"/>
+              <a:t>결과를 </a:t>
+            </a:r>
+            <a:r>
+              <a:rPr lang="en-US" altLang="ko-KR" sz="1400" b="1" dirty="0"/>
+              <a:t>‘</a:t>
+            </a:r>
+            <a:r>
+              <a:rPr lang="ko-KR" altLang="en-US" sz="1400" b="1" dirty="0"/>
+              <a:t>구현 누락</a:t>
+            </a:r>
+            <a:r>
+              <a:rPr lang="en-US" altLang="ko-KR" sz="1400" b="1" dirty="0"/>
+              <a:t>/</a:t>
+            </a:r>
+            <a:r>
+              <a:rPr lang="ko-KR" altLang="en-US" sz="1400" b="1" dirty="0"/>
+              <a:t>의도 불일치</a:t>
+            </a:r>
+            <a:r>
+              <a:rPr lang="en-US" altLang="ko-KR" sz="1400" b="1" dirty="0"/>
+              <a:t>/</a:t>
+            </a:r>
+            <a:r>
+              <a:rPr lang="ko-KR" altLang="en-US" sz="1400" b="1" dirty="0"/>
+              <a:t>부분 구현</a:t>
+            </a:r>
+            <a:r>
+              <a:rPr lang="en-US" altLang="ko-KR" sz="1400" b="1" dirty="0"/>
+              <a:t>’</a:t>
+            </a:r>
+            <a:r>
+              <a:rPr lang="ko-KR" altLang="en-US" sz="1400" b="1" dirty="0" err="1"/>
+              <a:t>으로</a:t>
+            </a:r>
+            <a:r>
+              <a:rPr lang="ko-KR" altLang="en-US" sz="1400" b="1" dirty="0"/>
+              <a:t> 유형화해 요구사항과 실제 구현 간 괴리를 체계적으로 관리</a:t>
             </a:r>
           </a:p>
         </p:txBody>
